--- a/public/fun/cards/life/life-06.pptx
+++ b/public/fun/cards/life/life-06.pptx
@@ -3085,7 +3085,7 @@
     <p:bg>
       <p:bgPr>
         <a:solidFill>
-          <a:srgbClr val="2C5541"/>
+          <a:srgbClr val="F3F4F6"/>
         </a:solidFill>
         <a:effectLst/>
       </p:bgPr>
@@ -3099,103 +3099,14 @@
       <p:grpSpPr/>
       <p:sp>
         <p:nvSpPr>
-          <p:cNvPr id="2" name="Rectangle 1"/>
-          <p:cNvSpPr/>
+          <p:cNvPr id="2" name="텍스트"/>
+          <p:cNvSpPr txBox="1"/>
           <p:nvPr/>
         </p:nvSpPr>
         <p:spPr>
           <a:xfrm>
-            <a:off x="0" y="1339200"/>
-            <a:ext cx="3240000" cy="460800"/>
-          </a:xfrm>
-          <a:prstGeom prst="rect">
-            <a:avLst/>
-          </a:prstGeom>
-          <a:solidFill>
-            <a:srgbClr val="D5ECE0"/>
-          </a:solidFill>
-          <a:ln>
-            <a:noFill/>
-          </a:ln>
-        </p:spPr>
-        <p:txBody>
-          <a:bodyPr rtlCol="0" anchor="ctr"/>
-          <a:lstStyle/>
-          <a:p>
-            <a:pPr algn="ctr"/>
-          </a:p>
-        </p:txBody>
-      </p:sp>
-      <p:sp>
-        <p:nvSpPr>
-          <p:cNvPr id="3" name="Oval 2"/>
-          <p:cNvSpPr/>
-          <p:nvPr/>
-        </p:nvSpPr>
-        <p:spPr>
-          <a:xfrm>
-            <a:off x="2808720" y="281520"/>
-            <a:ext cx="142560" cy="190080"/>
-          </a:xfrm>
-          <a:prstGeom prst="ellipse">
-            <a:avLst/>
-          </a:prstGeom>
-          <a:noFill/>
-          <a:ln w="27720">
-            <a:solidFill>
-              <a:srgbClr val="4E705F"/>
-            </a:solidFill>
-          </a:ln>
-        </p:spPr>
-        <p:txBody>
-          <a:bodyPr rtlCol="0" anchor="ctr"/>
-          <a:lstStyle/>
-          <a:p>
-            <a:pPr algn="ctr"/>
-          </a:p>
-        </p:txBody>
-      </p:sp>
-      <p:sp>
-        <p:nvSpPr>
-          <p:cNvPr id="4" name="Rounded Rectangle 3"/>
-          <p:cNvSpPr/>
-          <p:nvPr/>
-        </p:nvSpPr>
-        <p:spPr>
-          <a:xfrm>
-            <a:off x="2729520" y="392400"/>
-            <a:ext cx="300960" cy="205920"/>
-          </a:xfrm>
-          <a:prstGeom prst="roundRect">
-            <a:avLst>
-              <a:gd name="adj" fmla="val 13461"/>
-            </a:avLst>
-          </a:prstGeom>
-          <a:solidFill>
-            <a:srgbClr val="D5ECE0"/>
-          </a:solidFill>
-          <a:ln>
-            <a:noFill/>
-          </a:ln>
-        </p:spPr>
-        <p:txBody>
-          <a:bodyPr rtlCol="0" anchor="ctr"/>
-          <a:lstStyle/>
-          <a:p>
-            <a:pPr algn="ctr"/>
-          </a:p>
-        </p:txBody>
-      </p:sp>
-      <p:sp>
-        <p:nvSpPr>
-          <p:cNvPr id="5" name="텍스트"/>
-          <p:cNvSpPr txBox="1"/>
-          <p:nvPr/>
-        </p:nvSpPr>
-        <p:spPr>
-          <a:xfrm>
-            <a:off x="216000" y="230400"/>
-            <a:ext cx="2160000" cy="313692"/>
+            <a:off x="252000" y="223200"/>
+            <a:ext cx="2016000" cy="133351"/>
           </a:xfrm>
           <a:prstGeom prst="rect">
             <a:avLst/>
@@ -3210,32 +3121,221 @@
           <a:p>
             <a:pPr algn="l">
               <a:lnSpc>
-                <a:spcPts val="2755"/>
+                <a:spcPts val="1015"/>
               </a:lnSpc>
             </a:pPr>
             <a:r>
-              <a:rPr sz="1900" b="1" spc="50">
+              <a:rPr sz="700" b="1" spc="200">
+                <a:solidFill>
+                  <a:srgbClr val="6B7280"/>
+                </a:solidFill>
+                <a:latin typeface="맑은 고딕"/>
+                <a:ea typeface="맑은 고딕"/>
+              </a:rPr>
+              <a:t>상호명</a:t>
+            </a:r>
+          </a:p>
+        </p:txBody>
+      </p:sp>
+      <p:sp>
+        <p:nvSpPr>
+          <p:cNvPr id="3" name="텍스트"/>
+          <p:cNvSpPr txBox="1"/>
+          <p:nvPr/>
+        </p:nvSpPr>
+        <p:spPr>
+          <a:xfrm>
+            <a:off x="252000" y="468000"/>
+            <a:ext cx="2520000" cy="360000"/>
+          </a:xfrm>
+          <a:prstGeom prst="rect">
+            <a:avLst/>
+          </a:prstGeom>
+          <a:noFill/>
+        </p:spPr>
+        <p:txBody>
+          <a:bodyPr wrap="square" lIns="0" rIns="0" tIns="0" bIns="0" anchor="t">
+            <a:spAutoFit/>
+          </a:bodyPr>
+          <a:lstStyle/>
+          <a:p>
+            <a:pPr algn="l">
+              <a:lnSpc>
+                <a:spcPts val="3190"/>
+              </a:lnSpc>
+            </a:pPr>
+            <a:r>
+              <a:rPr sz="2200" b="1">
+                <a:solidFill>
+                  <a:srgbClr val="12151C"/>
+                </a:solidFill>
+                <a:latin typeface="맑은 고딕"/>
+                <a:ea typeface="맑은 고딕"/>
+              </a:rPr>
+              <a:t>강도윤</a:t>
+            </a:r>
+          </a:p>
+        </p:txBody>
+      </p:sp>
+      <p:sp>
+        <p:nvSpPr>
+          <p:cNvPr id="4" name="텍스트"/>
+          <p:cNvSpPr txBox="1"/>
+          <p:nvPr/>
+        </p:nvSpPr>
+        <p:spPr>
+          <a:xfrm>
+            <a:off x="252000" y="871200"/>
+            <a:ext cx="2520000" cy="171451"/>
+          </a:xfrm>
+          <a:prstGeom prst="rect">
+            <a:avLst/>
+          </a:prstGeom>
+          <a:noFill/>
+        </p:spPr>
+        <p:txBody>
+          <a:bodyPr wrap="square" lIns="0" rIns="0" tIns="0" bIns="0" anchor="t">
+            <a:spAutoFit/>
+          </a:bodyPr>
+          <a:lstStyle/>
+          <a:p>
+            <a:pPr algn="l">
+              <a:lnSpc>
+                <a:spcPts val="1305"/>
+              </a:lnSpc>
+            </a:pPr>
+            <a:r>
+              <a:rPr sz="900" b="0">
+                <a:solidFill>
+                  <a:srgbClr val="6B7280"/>
+                </a:solidFill>
+                <a:latin typeface="맑은 고딕"/>
+                <a:ea typeface="맑은 고딕"/>
+              </a:rPr>
+              <a:t>문구점 사장</a:t>
+            </a:r>
+          </a:p>
+        </p:txBody>
+      </p:sp>
+      <p:sp>
+        <p:nvSpPr>
+          <p:cNvPr id="5" name="텍스트"/>
+          <p:cNvSpPr txBox="1"/>
+          <p:nvPr/>
+        </p:nvSpPr>
+        <p:spPr>
+          <a:xfrm>
+            <a:off x="252000" y="1216800"/>
+            <a:ext cx="2520000" cy="129541"/>
+          </a:xfrm>
+          <a:prstGeom prst="rect">
+            <a:avLst/>
+          </a:prstGeom>
+          <a:noFill/>
+        </p:spPr>
+        <p:txBody>
+          <a:bodyPr wrap="square" lIns="0" rIns="0" tIns="0" bIns="0" anchor="t">
+            <a:spAutoFit/>
+          </a:bodyPr>
+          <a:lstStyle/>
+          <a:p>
+            <a:pPr algn="l">
+              <a:lnSpc>
+                <a:spcPts val="986"/>
+              </a:lnSpc>
+            </a:pPr>
+            <a:r>
+              <a:rPr sz="680" b="0">
+                <a:solidFill>
+                  <a:srgbClr val="6B7280"/>
+                </a:solidFill>
+                <a:latin typeface="맑은 고딕"/>
+                <a:ea typeface="맑은 고딕"/>
+              </a:rPr>
+              <a:t>주소를 입력해 주세요</a:t>
+            </a:r>
+          </a:p>
+        </p:txBody>
+      </p:sp>
+      <p:sp>
+        <p:nvSpPr>
+          <p:cNvPr id="6" name="Rectangle 5"/>
+          <p:cNvSpPr/>
+          <p:nvPr/>
+        </p:nvSpPr>
+        <p:spPr>
+          <a:xfrm>
+            <a:off x="0" y="1476000"/>
+            <a:ext cx="3240000" cy="324000"/>
+          </a:xfrm>
+          <a:prstGeom prst="rect">
+            <a:avLst/>
+          </a:prstGeom>
+          <a:solidFill>
+            <a:srgbClr val="FF3B6B"/>
+          </a:solidFill>
+          <a:ln>
+            <a:noFill/>
+          </a:ln>
+        </p:spPr>
+        <p:txBody>
+          <a:bodyPr rtlCol="0" anchor="ctr"/>
+          <a:lstStyle/>
+          <a:p>
+            <a:pPr algn="ctr"/>
+          </a:p>
+        </p:txBody>
+      </p:sp>
+      <p:sp>
+        <p:nvSpPr>
+          <p:cNvPr id="7" name="텍스트"/>
+          <p:cNvSpPr txBox="1"/>
+          <p:nvPr/>
+        </p:nvSpPr>
+        <p:spPr>
+          <a:xfrm>
+            <a:off x="252000" y="1569600"/>
+            <a:ext cx="1296000" cy="133351"/>
+          </a:xfrm>
+          <a:prstGeom prst="rect">
+            <a:avLst/>
+          </a:prstGeom>
+          <a:noFill/>
+        </p:spPr>
+        <p:txBody>
+          <a:bodyPr wrap="square" lIns="0" rIns="0" tIns="0" bIns="0" anchor="t">
+            <a:spAutoFit/>
+          </a:bodyPr>
+          <a:lstStyle/>
+          <a:p>
+            <a:pPr algn="l">
+              <a:lnSpc>
+                <a:spcPts val="1015"/>
+              </a:lnSpc>
+            </a:pPr>
+            <a:r>
+              <a:rPr sz="700" b="1">
                 <a:solidFill>
                   <a:srgbClr val="FFFFFF"/>
                 </a:solidFill>
                 <a:latin typeface="맑은 고딕"/>
                 <a:ea typeface="맑은 고딕"/>
               </a:rPr>
-              <a:t>강도윤</a:t>
-            </a:r>
-          </a:p>
-        </p:txBody>
-      </p:sp>
-      <p:sp>
-        <p:nvSpPr>
-          <p:cNvPr id="6" name="텍스트"/>
+              <a:t>010-1234-5678</a:t>
+            </a:r>
+          </a:p>
+        </p:txBody>
+      </p:sp>
+      <p:sp>
+        <p:nvSpPr>
+          <p:cNvPr id="8" name="텍스트"/>
           <p:cNvSpPr txBox="1"/>
           <p:nvPr/>
         </p:nvSpPr>
         <p:spPr>
           <a:xfrm>
-            <a:off x="216000" y="525600"/>
-            <a:ext cx="2160000" cy="122400"/>
+            <a:off x="1656000" y="1569600"/>
+            <a:ext cx="1368000" cy="133351"/>
           </a:xfrm>
           <a:prstGeom prst="rect">
             <a:avLst/>
@@ -3250,298 +3350,18 @@
           <a:p>
             <a:pPr algn="l">
               <a:lnSpc>
-                <a:spcPts val="1232"/>
-              </a:lnSpc>
-            </a:pPr>
-            <a:r>
-              <a:rPr sz="850" b="1">
-                <a:solidFill>
-                  <a:srgbClr val="D5ECE0"/>
-                </a:solidFill>
-                <a:latin typeface="맑은 고딕"/>
-                <a:ea typeface="맑은 고딕"/>
-              </a:rPr>
-              <a:t>문구점 사장</a:t>
-            </a:r>
-          </a:p>
-        </p:txBody>
-      </p:sp>
-      <p:sp>
-        <p:nvSpPr>
-          <p:cNvPr id="7" name="텍스트"/>
-          <p:cNvSpPr txBox="1"/>
-          <p:nvPr/>
-        </p:nvSpPr>
-        <p:spPr>
-          <a:xfrm>
-            <a:off x="216000" y="770400"/>
-            <a:ext cx="2160000" cy="100800"/>
-          </a:xfrm>
-          <a:prstGeom prst="rect">
-            <a:avLst/>
-          </a:prstGeom>
-          <a:noFill/>
-        </p:spPr>
-        <p:txBody>
-          <a:bodyPr wrap="square" lIns="0" rIns="0" tIns="0" bIns="0" anchor="t">
-            <a:spAutoFit/>
-          </a:bodyPr>
-          <a:lstStyle/>
-          <a:p>
-            <a:pPr algn="l">
-              <a:lnSpc>
-                <a:spcPts val="1087"/>
-              </a:lnSpc>
-            </a:pPr>
-            <a:r>
-              <a:rPr sz="750" b="1" spc="150">
-                <a:solidFill>
-                  <a:srgbClr val="B5C4BC"/>
-                </a:solidFill>
-                <a:latin typeface="맑은 고딕"/>
-                <a:ea typeface="맑은 고딕"/>
-              </a:rPr>
-              <a:t>상호명</a:t>
-            </a:r>
-          </a:p>
-        </p:txBody>
-      </p:sp>
-      <p:sp>
-        <p:nvSpPr>
-          <p:cNvPr id="8" name="텍스트"/>
-          <p:cNvSpPr txBox="1"/>
-          <p:nvPr/>
-        </p:nvSpPr>
-        <p:spPr>
-          <a:xfrm>
-            <a:off x="216000" y="1432800"/>
-            <a:ext cx="122400" cy="108000"/>
-          </a:xfrm>
-          <a:prstGeom prst="rect">
-            <a:avLst/>
-          </a:prstGeom>
-          <a:noFill/>
-        </p:spPr>
-        <p:txBody>
-          <a:bodyPr wrap="square" lIns="0" rIns="0" tIns="0" bIns="0" anchor="t">
-            <a:spAutoFit/>
-          </a:bodyPr>
-          <a:lstStyle/>
-          <a:p>
-            <a:pPr algn="l">
-              <a:lnSpc>
                 <a:spcPts val="1015"/>
               </a:lnSpc>
             </a:pPr>
             <a:r>
               <a:rPr sz="700" b="1">
                 <a:solidFill>
-                  <a:srgbClr val="666666"/>
-                </a:solidFill>
-                <a:latin typeface="맑은 고딕"/>
-                <a:ea typeface="맑은 고딕"/>
-              </a:rPr>
-              <a:t>T</a:t>
-            </a:r>
-          </a:p>
-        </p:txBody>
-      </p:sp>
-      <p:sp>
-        <p:nvSpPr>
-          <p:cNvPr id="9" name="텍스트"/>
-          <p:cNvSpPr txBox="1"/>
-          <p:nvPr/>
-        </p:nvSpPr>
-        <p:spPr>
-          <a:xfrm>
-            <a:off x="360000" y="1432800"/>
-            <a:ext cx="1368000" cy="108000"/>
-          </a:xfrm>
-          <a:prstGeom prst="rect">
-            <a:avLst/>
-          </a:prstGeom>
-          <a:noFill/>
-        </p:spPr>
-        <p:txBody>
-          <a:bodyPr wrap="square" lIns="0" rIns="0" tIns="0" bIns="0" anchor="t">
-            <a:spAutoFit/>
-          </a:bodyPr>
-          <a:lstStyle/>
-          <a:p>
-            <a:pPr algn="l">
-              <a:lnSpc>
-                <a:spcPts val="1015"/>
-              </a:lnSpc>
-            </a:pPr>
-            <a:r>
-              <a:rPr sz="700" b="0">
-                <a:solidFill>
-                  <a:srgbClr val="666666"/>
-                </a:solidFill>
-                <a:latin typeface="맑은 고딕"/>
-                <a:ea typeface="맑은 고딕"/>
-              </a:rPr>
-              <a:t>010-1234-5678</a:t>
-            </a:r>
-          </a:p>
-        </p:txBody>
-      </p:sp>
-      <p:sp>
-        <p:nvSpPr>
-          <p:cNvPr id="10" name="텍스트"/>
-          <p:cNvSpPr txBox="1"/>
-          <p:nvPr/>
-        </p:nvSpPr>
-        <p:spPr>
-          <a:xfrm>
-            <a:off x="216000" y="1576800"/>
-            <a:ext cx="122400" cy="108000"/>
-          </a:xfrm>
-          <a:prstGeom prst="rect">
-            <a:avLst/>
-          </a:prstGeom>
-          <a:noFill/>
-        </p:spPr>
-        <p:txBody>
-          <a:bodyPr wrap="square" lIns="0" rIns="0" tIns="0" bIns="0" anchor="t">
-            <a:spAutoFit/>
-          </a:bodyPr>
-          <a:lstStyle/>
-          <a:p>
-            <a:pPr algn="l">
-              <a:lnSpc>
-                <a:spcPts val="1015"/>
-              </a:lnSpc>
-            </a:pPr>
-            <a:r>
-              <a:rPr sz="700" b="1">
-                <a:solidFill>
-                  <a:srgbClr val="666666"/>
-                </a:solidFill>
-                <a:latin typeface="맑은 고딕"/>
-                <a:ea typeface="맑은 고딕"/>
-              </a:rPr>
-              <a:t>E</a:t>
-            </a:r>
-          </a:p>
-        </p:txBody>
-      </p:sp>
-      <p:sp>
-        <p:nvSpPr>
-          <p:cNvPr id="11" name="텍스트"/>
-          <p:cNvSpPr txBox="1"/>
-          <p:nvPr/>
-        </p:nvSpPr>
-        <p:spPr>
-          <a:xfrm>
-            <a:off x="360000" y="1576800"/>
-            <a:ext cx="1368000" cy="108000"/>
-          </a:xfrm>
-          <a:prstGeom prst="rect">
-            <a:avLst/>
-          </a:prstGeom>
-          <a:noFill/>
-        </p:spPr>
-        <p:txBody>
-          <a:bodyPr wrap="square" lIns="0" rIns="0" tIns="0" bIns="0" anchor="t">
-            <a:spAutoFit/>
-          </a:bodyPr>
-          <a:lstStyle/>
-          <a:p>
-            <a:pPr algn="l">
-              <a:lnSpc>
-                <a:spcPts val="1015"/>
-              </a:lnSpc>
-            </a:pPr>
-            <a:r>
-              <a:rPr sz="700" b="0">
-                <a:solidFill>
-                  <a:srgbClr val="666666"/>
+                  <a:srgbClr val="FFFFFF"/>
                 </a:solidFill>
                 <a:latin typeface="맑은 고딕"/>
                 <a:ea typeface="맑은 고딕"/>
               </a:rPr>
               <a:t>name@example.com</a:t>
-            </a:r>
-          </a:p>
-        </p:txBody>
-      </p:sp>
-      <p:sp>
-        <p:nvSpPr>
-          <p:cNvPr id="12" name="텍스트"/>
-          <p:cNvSpPr txBox="1"/>
-          <p:nvPr/>
-        </p:nvSpPr>
-        <p:spPr>
-          <a:xfrm>
-            <a:off x="1800000" y="1432800"/>
-            <a:ext cx="122400" cy="108000"/>
-          </a:xfrm>
-          <a:prstGeom prst="rect">
-            <a:avLst/>
-          </a:prstGeom>
-          <a:noFill/>
-        </p:spPr>
-        <p:txBody>
-          <a:bodyPr wrap="square" lIns="0" rIns="0" tIns="0" bIns="0" anchor="t">
-            <a:spAutoFit/>
-          </a:bodyPr>
-          <a:lstStyle/>
-          <a:p>
-            <a:pPr algn="l">
-              <a:lnSpc>
-                <a:spcPts val="1015"/>
-              </a:lnSpc>
-            </a:pPr>
-            <a:r>
-              <a:rPr sz="700" b="1">
-                <a:solidFill>
-                  <a:srgbClr val="666666"/>
-                </a:solidFill>
-                <a:latin typeface="맑은 고딕"/>
-                <a:ea typeface="맑은 고딕"/>
-              </a:rPr>
-              <a:t>A</a:t>
-            </a:r>
-          </a:p>
-        </p:txBody>
-      </p:sp>
-      <p:sp>
-        <p:nvSpPr>
-          <p:cNvPr id="13" name="텍스트"/>
-          <p:cNvSpPr txBox="1"/>
-          <p:nvPr/>
-        </p:nvSpPr>
-        <p:spPr>
-          <a:xfrm>
-            <a:off x="1944000" y="1432800"/>
-            <a:ext cx="1188000" cy="216000"/>
-          </a:xfrm>
-          <a:prstGeom prst="rect">
-            <a:avLst/>
-          </a:prstGeom>
-          <a:noFill/>
-        </p:spPr>
-        <p:txBody>
-          <a:bodyPr wrap="square" lIns="0" rIns="0" tIns="0" bIns="0" anchor="t">
-            <a:spAutoFit/>
-          </a:bodyPr>
-          <a:lstStyle/>
-          <a:p>
-            <a:pPr algn="l">
-              <a:lnSpc>
-                <a:spcPts val="1015"/>
-              </a:lnSpc>
-            </a:pPr>
-            <a:r>
-              <a:rPr sz="700" b="0">
-                <a:solidFill>
-                  <a:srgbClr val="666666"/>
-                </a:solidFill>
-                <a:latin typeface="맑은 고딕"/>
-                <a:ea typeface="맑은 고딕"/>
-              </a:rPr>
-              <a:t>주소를 입력해 주세요</a:t>
             </a:r>
           </a:p>
         </p:txBody>
@@ -3574,77 +3394,20 @@
       <p:grpSpPr/>
       <p:sp>
         <p:nvSpPr>
-          <p:cNvPr id="2" name="Freeform 1"/>
+          <p:cNvPr id="2" name="Oval 1"/>
           <p:cNvSpPr/>
           <p:nvPr/>
         </p:nvSpPr>
         <p:spPr>
           <a:xfrm>
-            <a:off x="2016000" y="576000"/>
-            <a:ext cx="1224000" cy="1224000"/>
+            <a:off x="1411200" y="295200"/>
+            <a:ext cx="417600" cy="417600"/>
           </a:xfrm>
-          <a:custGeom>
+          <a:prstGeom prst="ellipse">
             <a:avLst/>
-            <a:gdLst/>
-            <a:ahLst/>
-            <a:cxnLst/>
-            <a:rect l="l" t="t" r="r" b="b"/>
-            <a:pathLst>
-              <a:path w="1224000" h="1224000">
-                <a:moveTo>
-                  <a:pt x="1224000" y="1224000"/>
-                </a:moveTo>
-                <a:lnTo>
-                  <a:pt x="0" y="1224000"/>
-                </a:lnTo>
-                <a:lnTo>
-                  <a:pt x="7696" y="1086955"/>
-                </a:lnTo>
-                <a:lnTo>
-                  <a:pt x="30688" y="951634"/>
-                </a:lnTo>
-                <a:lnTo>
-                  <a:pt x="68687" y="819738"/>
-                </a:lnTo>
-                <a:lnTo>
-                  <a:pt x="121214" y="692926"/>
-                </a:lnTo>
-                <a:lnTo>
-                  <a:pt x="187610" y="572793"/>
-                </a:lnTo>
-                <a:lnTo>
-                  <a:pt x="267038" y="460848"/>
-                </a:lnTo>
-                <a:lnTo>
-                  <a:pt x="358501" y="358501"/>
-                </a:lnTo>
-                <a:lnTo>
-                  <a:pt x="460848" y="267038"/>
-                </a:lnTo>
-                <a:lnTo>
-                  <a:pt x="572793" y="187610"/>
-                </a:lnTo>
-                <a:lnTo>
-                  <a:pt x="692926" y="121214"/>
-                </a:lnTo>
-                <a:lnTo>
-                  <a:pt x="819738" y="68687"/>
-                </a:lnTo>
-                <a:lnTo>
-                  <a:pt x="951634" y="30688"/>
-                </a:lnTo>
-                <a:lnTo>
-                  <a:pt x="1086955" y="7696"/>
-                </a:lnTo>
-                <a:lnTo>
-                  <a:pt x="1224000" y="0"/>
-                </a:lnTo>
-                <a:close/>
-              </a:path>
-            </a:pathLst>
-          </a:custGeom>
+          </a:prstGeom>
           <a:solidFill>
-            <a:srgbClr val="396F54"/>
+            <a:srgbClr val="FF3B6B"/>
           </a:solidFill>
           <a:ln>
             <a:noFill/>
@@ -3660,160 +3423,14 @@
       </p:sp>
       <p:sp>
         <p:nvSpPr>
-          <p:cNvPr id="3" name="Freeform 2"/>
-          <p:cNvSpPr/>
+          <p:cNvPr id="3" name="텍스트"/>
+          <p:cNvSpPr txBox="1"/>
           <p:nvPr/>
         </p:nvSpPr>
         <p:spPr>
           <a:xfrm>
-            <a:off x="2520000" y="1080000"/>
-            <a:ext cx="720000" cy="720000"/>
-          </a:xfrm>
-          <a:custGeom>
-            <a:avLst/>
-            <a:gdLst/>
-            <a:ahLst/>
-            <a:cxnLst/>
-            <a:rect l="l" t="t" r="r" b="b"/>
-            <a:pathLst>
-              <a:path w="720000" h="720000">
-                <a:moveTo>
-                  <a:pt x="720000" y="720000"/>
-                </a:moveTo>
-                <a:lnTo>
-                  <a:pt x="0" y="720000"/>
-                </a:lnTo>
-                <a:lnTo>
-                  <a:pt x="4527" y="639386"/>
-                </a:lnTo>
-                <a:lnTo>
-                  <a:pt x="18052" y="559785"/>
-                </a:lnTo>
-                <a:lnTo>
-                  <a:pt x="40404" y="482199"/>
-                </a:lnTo>
-                <a:lnTo>
-                  <a:pt x="71302" y="407604"/>
-                </a:lnTo>
-                <a:lnTo>
-                  <a:pt x="110359" y="336937"/>
-                </a:lnTo>
-                <a:lnTo>
-                  <a:pt x="157081" y="271087"/>
-                </a:lnTo>
-                <a:lnTo>
-                  <a:pt x="210883" y="210883"/>
-                </a:lnTo>
-                <a:lnTo>
-                  <a:pt x="271087" y="157081"/>
-                </a:lnTo>
-                <a:lnTo>
-                  <a:pt x="336937" y="110359"/>
-                </a:lnTo>
-                <a:lnTo>
-                  <a:pt x="407604" y="71302"/>
-                </a:lnTo>
-                <a:lnTo>
-                  <a:pt x="482199" y="40404"/>
-                </a:lnTo>
-                <a:lnTo>
-                  <a:pt x="559785" y="18052"/>
-                </a:lnTo>
-                <a:lnTo>
-                  <a:pt x="639386" y="4527"/>
-                </a:lnTo>
-                <a:lnTo>
-                  <a:pt x="720000" y="0"/>
-                </a:lnTo>
-                <a:close/>
-              </a:path>
-            </a:pathLst>
-          </a:custGeom>
-          <a:solidFill>
-            <a:srgbClr val="D5ECE0"/>
-          </a:solidFill>
-          <a:ln>
-            <a:noFill/>
-          </a:ln>
-        </p:spPr>
-        <p:txBody>
-          <a:bodyPr rtlCol="0" anchor="ctr"/>
-          <a:lstStyle/>
-          <a:p>
-            <a:pPr algn="ctr"/>
-          </a:p>
-        </p:txBody>
-      </p:sp>
-      <p:sp>
-        <p:nvSpPr>
-          <p:cNvPr id="4" name="Oval 3"/>
-          <p:cNvSpPr/>
-          <p:nvPr/>
-        </p:nvSpPr>
-        <p:spPr>
-          <a:xfrm>
-            <a:off x="2834640" y="1380240"/>
-            <a:ext cx="90720" cy="120960"/>
-          </a:xfrm>
-          <a:prstGeom prst="ellipse">
-            <a:avLst/>
-          </a:prstGeom>
-          <a:noFill/>
-          <a:ln w="17640">
-            <a:solidFill>
-              <a:srgbClr val="808080"/>
-            </a:solidFill>
-          </a:ln>
-        </p:spPr>
-        <p:txBody>
-          <a:bodyPr rtlCol="0" anchor="ctr"/>
-          <a:lstStyle/>
-          <a:p>
-            <a:pPr algn="ctr"/>
-          </a:p>
-        </p:txBody>
-      </p:sp>
-      <p:sp>
-        <p:nvSpPr>
-          <p:cNvPr id="5" name="Rounded Rectangle 4"/>
-          <p:cNvSpPr/>
-          <p:nvPr/>
-        </p:nvSpPr>
-        <p:spPr>
-          <a:xfrm>
-            <a:off x="2784240" y="1450800"/>
-            <a:ext cx="191520" cy="131040"/>
-          </a:xfrm>
-          <a:prstGeom prst="roundRect">
-            <a:avLst>
-              <a:gd name="adj" fmla="val 13461"/>
-            </a:avLst>
-          </a:prstGeom>
-          <a:solidFill>
-            <a:srgbClr val="FFFFFF"/>
-          </a:solidFill>
-          <a:ln>
-            <a:noFill/>
-          </a:ln>
-        </p:spPr>
-        <p:txBody>
-          <a:bodyPr rtlCol="0" anchor="ctr"/>
-          <a:lstStyle/>
-          <a:p>
-            <a:pPr algn="ctr"/>
-          </a:p>
-        </p:txBody>
-      </p:sp>
-      <p:sp>
-        <p:nvSpPr>
-          <p:cNvPr id="6" name="텍스트"/>
-          <p:cNvSpPr txBox="1"/>
-          <p:nvPr/>
-        </p:nvSpPr>
-        <p:spPr>
-          <a:xfrm>
-            <a:off x="252000" y="324000"/>
-            <a:ext cx="1944000" cy="720000"/>
+            <a:off x="1368000" y="324000"/>
+            <a:ext cx="504000" cy="360000"/>
           </a:xfrm>
           <a:prstGeom prst="rect">
             <a:avLst/>
@@ -3821,39 +3438,39 @@
           <a:noFill/>
         </p:spPr>
         <p:txBody>
-          <a:bodyPr wrap="square" lIns="0" rIns="0" tIns="0" bIns="0" anchor="t">
+          <a:bodyPr wrap="square" lIns="0" rIns="0" tIns="0" bIns="0" anchor="ctr">
             <a:spAutoFit/>
           </a:bodyPr>
           <a:lstStyle/>
           <a:p>
-            <a:pPr algn="l">
+            <a:pPr algn="ctr">
               <a:lnSpc>
-                <a:spcPts val="1739"/>
+                <a:spcPts val="3769"/>
               </a:lnSpc>
             </a:pPr>
             <a:r>
-              <a:rPr sz="1200" b="1">
+              <a:rPr sz="2600" b="1">
                 <a:solidFill>
-                  <a:srgbClr val="1C3629"/>
+                  <a:srgbClr val="FFFFFF"/>
                 </a:solidFill>
-                <a:latin typeface="바탕"/>
-                <a:ea typeface="바탕"/>
+                <a:latin typeface="맑은 고딕"/>
+                <a:ea typeface="맑은 고딕"/>
               </a:rPr>
-              <a:t>정성으로 손보는 작은 살림</a:t>
-            </a:r>
-          </a:p>
-        </p:txBody>
-      </p:sp>
-      <p:sp>
-        <p:nvSpPr>
-          <p:cNvPr id="7" name="텍스트"/>
+              <a:t>상</a:t>
+            </a:r>
+          </a:p>
+        </p:txBody>
+      </p:sp>
+      <p:sp>
+        <p:nvSpPr>
+          <p:cNvPr id="4" name="텍스트"/>
           <p:cNvSpPr txBox="1"/>
           <p:nvPr/>
         </p:nvSpPr>
         <p:spPr>
           <a:xfrm>
-            <a:off x="252000" y="1476000"/>
-            <a:ext cx="1440000" cy="108000"/>
+            <a:off x="360000" y="820800"/>
+            <a:ext cx="2520000" cy="161926"/>
           </a:xfrm>
           <a:prstGeom prst="rect">
             <a:avLst/>
@@ -3866,20 +3483,89 @@
           </a:bodyPr>
           <a:lstStyle/>
           <a:p>
-            <a:pPr algn="l">
+            <a:pPr algn="ctr">
               <a:lnSpc>
-                <a:spcPts val="1087"/>
+                <a:spcPts val="1232"/>
               </a:lnSpc>
             </a:pPr>
             <a:r>
-              <a:rPr sz="750" b="1" spc="200">
+              <a:rPr sz="850" b="1" spc="200">
                 <a:solidFill>
-                  <a:srgbClr val="66766E"/>
+                  <a:srgbClr val="12151C"/>
                 </a:solidFill>
                 <a:latin typeface="맑은 고딕"/>
                 <a:ea typeface="맑은 고딕"/>
               </a:rPr>
               <a:t>상호명</a:t>
+            </a:r>
+          </a:p>
+        </p:txBody>
+      </p:sp>
+      <p:sp>
+        <p:nvSpPr>
+          <p:cNvPr id="5" name="Rectangle 4"/>
+          <p:cNvSpPr/>
+          <p:nvPr/>
+        </p:nvSpPr>
+        <p:spPr>
+          <a:xfrm>
+            <a:off x="1530000" y="1051200"/>
+            <a:ext cx="180000" cy="14400"/>
+          </a:xfrm>
+          <a:prstGeom prst="rect">
+            <a:avLst/>
+          </a:prstGeom>
+          <a:solidFill>
+            <a:srgbClr val="FF3B6B"/>
+          </a:solidFill>
+          <a:ln>
+            <a:noFill/>
+          </a:ln>
+        </p:spPr>
+        <p:txBody>
+          <a:bodyPr rtlCol="0" anchor="ctr"/>
+          <a:lstStyle/>
+          <a:p>
+            <a:pPr algn="ctr"/>
+          </a:p>
+        </p:txBody>
+      </p:sp>
+      <p:sp>
+        <p:nvSpPr>
+          <p:cNvPr id="6" name="텍스트"/>
+          <p:cNvSpPr txBox="1"/>
+          <p:nvPr/>
+        </p:nvSpPr>
+        <p:spPr>
+          <a:xfrm>
+            <a:off x="540000" y="1188000"/>
+            <a:ext cx="2160000" cy="360000"/>
+          </a:xfrm>
+          <a:prstGeom prst="rect">
+            <a:avLst/>
+          </a:prstGeom>
+          <a:noFill/>
+        </p:spPr>
+        <p:txBody>
+          <a:bodyPr wrap="square" lIns="0" rIns="0" tIns="0" bIns="0" anchor="t">
+            <a:spAutoFit/>
+          </a:bodyPr>
+          <a:lstStyle/>
+          <a:p>
+            <a:pPr algn="ctr">
+              <a:lnSpc>
+                <a:spcPts val="1305"/>
+              </a:lnSpc>
+            </a:pPr>
+            <a:r>
+              <a:rPr sz="900" b="1">
+                <a:solidFill>
+                  <a:srgbClr val="6B7280"/>
+                </a:solidFill>
+                <a:latin typeface="맑은 고딕"/>
+                <a:ea typeface="맑은 고딕"/>
+              </a:rPr>
+              <a:t>정성으로 손보는 작은 살림</a:t>
             </a:r>
           </a:p>
         </p:txBody>

--- a/public/fun/cards/life/life-06.pptx
+++ b/public/fun/cards/life/life-06.pptx
@@ -3105,8 +3105,8 @@
         </p:nvSpPr>
         <p:spPr>
           <a:xfrm>
-            <a:off x="252000" y="223200"/>
-            <a:ext cx="2016000" cy="133351"/>
+            <a:off x="252000" y="252000"/>
+            <a:ext cx="1512000" cy="123826"/>
           </a:xfrm>
           <a:prstGeom prst="rect">
             <a:avLst/>
@@ -3121,11 +3121,11 @@
           <a:p>
             <a:pPr algn="l">
               <a:lnSpc>
-                <a:spcPts val="1015"/>
+                <a:spcPts val="942"/>
               </a:lnSpc>
             </a:pPr>
             <a:r>
-              <a:rPr sz="700" b="1" spc="200">
+              <a:rPr sz="650" b="1" spc="220">
                 <a:solidFill>
                   <a:srgbClr val="6B7280"/>
                 </a:solidFill>
@@ -3137,16 +3137,37 @@
           </a:p>
         </p:txBody>
       </p:sp>
-      <p:sp>
-        <p:nvSpPr>
-          <p:cNvPr id="3" name="텍스트"/>
+      <p:cxnSp>
+        <p:nvCxnSpPr>
+          <p:cNvPr id="3" name="Connector 2"/>
+          <p:cNvCxnSpPr/>
+          <p:nvPr/>
+        </p:nvCxnSpPr>
+        <p:spPr>
+          <a:xfrm>
+            <a:off x="252000" y="388800"/>
+            <a:ext cx="2736000" cy="0"/>
+          </a:xfrm>
+          <a:prstGeom prst="line">
+            <a:avLst/>
+          </a:prstGeom>
+          <a:ln w="3600">
+            <a:solidFill>
+              <a:srgbClr val="DCDFE4"/>
+            </a:solidFill>
+          </a:ln>
+        </p:spPr>
+      </p:cxnSp>
+      <p:sp>
+        <p:nvSpPr>
+          <p:cNvPr id="4" name="텍스트"/>
           <p:cNvSpPr txBox="1"/>
           <p:nvPr/>
         </p:nvSpPr>
         <p:spPr>
           <a:xfrm>
-            <a:off x="252000" y="468000"/>
-            <a:ext cx="2520000" cy="360000"/>
+            <a:off x="252000" y="576000"/>
+            <a:ext cx="1800000" cy="237600"/>
           </a:xfrm>
           <a:prstGeom prst="rect">
             <a:avLst/>
@@ -3161,11 +3182,11 @@
           <a:p>
             <a:pPr algn="l">
               <a:lnSpc>
-                <a:spcPts val="3190"/>
+                <a:spcPts val="1957"/>
               </a:lnSpc>
             </a:pPr>
             <a:r>
-              <a:rPr sz="2200" b="1">
+              <a:rPr sz="1350" b="1" spc="120">
                 <a:solidFill>
                   <a:srgbClr val="12151C"/>
                 </a:solidFill>
@@ -3179,14 +3200,14 @@
       </p:sp>
       <p:sp>
         <p:nvSpPr>
-          <p:cNvPr id="4" name="텍스트"/>
+          <p:cNvPr id="5" name="텍스트"/>
           <p:cNvSpPr txBox="1"/>
           <p:nvPr/>
         </p:nvSpPr>
         <p:spPr>
           <a:xfrm>
-            <a:off x="252000" y="871200"/>
-            <a:ext cx="2520000" cy="171451"/>
+            <a:off x="252000" y="828000"/>
+            <a:ext cx="1800000" cy="133351"/>
           </a:xfrm>
           <a:prstGeom prst="rect">
             <a:avLst/>
@@ -3201,11 +3222,11 @@
           <a:p>
             <a:pPr algn="l">
               <a:lnSpc>
-                <a:spcPts val="1305"/>
+                <a:spcPts val="1015"/>
               </a:lnSpc>
             </a:pPr>
             <a:r>
-              <a:rPr sz="900" b="0">
+              <a:rPr sz="700" b="0" spc="60">
                 <a:solidFill>
                   <a:srgbClr val="6B7280"/>
                 </a:solidFill>
@@ -3219,14 +3240,14 @@
       </p:sp>
       <p:sp>
         <p:nvSpPr>
-          <p:cNvPr id="5" name="텍스트"/>
+          <p:cNvPr id="6" name="텍스트"/>
           <p:cNvSpPr txBox="1"/>
           <p:nvPr/>
         </p:nvSpPr>
         <p:spPr>
           <a:xfrm>
-            <a:off x="252000" y="1216800"/>
-            <a:ext cx="2520000" cy="129541"/>
+            <a:off x="252000" y="1036800"/>
+            <a:ext cx="2520000" cy="123826"/>
           </a:xfrm>
           <a:prstGeom prst="rect">
             <a:avLst/>
@@ -3241,11 +3262,11 @@
           <a:p>
             <a:pPr algn="l">
               <a:lnSpc>
-                <a:spcPts val="986"/>
+                <a:spcPts val="942"/>
               </a:lnSpc>
             </a:pPr>
             <a:r>
-              <a:rPr sz="680" b="0">
+              <a:rPr sz="650" b="0">
                 <a:solidFill>
                   <a:srgbClr val="6B7280"/>
                 </a:solidFill>
@@ -3259,14 +3280,14 @@
       </p:sp>
       <p:sp>
         <p:nvSpPr>
-          <p:cNvPr id="6" name="Rectangle 5"/>
+          <p:cNvPr id="7" name="Rectangle 6"/>
           <p:cNvSpPr/>
           <p:nvPr/>
         </p:nvSpPr>
         <p:spPr>
           <a:xfrm>
-            <a:off x="0" y="1476000"/>
-            <a:ext cx="3240000" cy="324000"/>
+            <a:off x="0" y="1339200"/>
+            <a:ext cx="3240000" cy="460800"/>
           </a:xfrm>
           <a:prstGeom prst="rect">
             <a:avLst/>
@@ -3288,14 +3309,14 @@
       </p:sp>
       <p:sp>
         <p:nvSpPr>
-          <p:cNvPr id="7" name="텍스트"/>
+          <p:cNvPr id="8" name="텍스트"/>
           <p:cNvSpPr txBox="1"/>
           <p:nvPr/>
         </p:nvSpPr>
         <p:spPr>
           <a:xfrm>
-            <a:off x="252000" y="1569600"/>
-            <a:ext cx="1296000" cy="133351"/>
+            <a:off x="252000" y="1476000"/>
+            <a:ext cx="936000" cy="91441"/>
           </a:xfrm>
           <a:prstGeom prst="rect">
             <a:avLst/>
@@ -3310,11 +3331,53 @@
           <a:p>
             <a:pPr algn="l">
               <a:lnSpc>
-                <a:spcPts val="1015"/>
+                <a:spcPts val="696"/>
               </a:lnSpc>
             </a:pPr>
             <a:r>
-              <a:rPr sz="700" b="1">
+              <a:rPr sz="480" b="1" spc="140">
+                <a:solidFill>
+                  <a:srgbClr val="FFFFFF">
+                    <a:alpha val="70000"/>
+                  </a:srgbClr>
+                </a:solidFill>
+                <a:latin typeface="맑은 고딕"/>
+                <a:ea typeface="맑은 고딕"/>
+              </a:rPr>
+              <a:t>TEL</a:t>
+            </a:r>
+          </a:p>
+        </p:txBody>
+      </p:sp>
+      <p:sp>
+        <p:nvSpPr>
+          <p:cNvPr id="9" name="텍스트"/>
+          <p:cNvSpPr txBox="1"/>
+          <p:nvPr/>
+        </p:nvSpPr>
+        <p:spPr>
+          <a:xfrm>
+            <a:off x="252000" y="1576800"/>
+            <a:ext cx="936000" cy="123826"/>
+          </a:xfrm>
+          <a:prstGeom prst="rect">
+            <a:avLst/>
+          </a:prstGeom>
+          <a:noFill/>
+        </p:spPr>
+        <p:txBody>
+          <a:bodyPr wrap="square" lIns="0" rIns="0" tIns="0" bIns="0" anchor="t">
+            <a:spAutoFit/>
+          </a:bodyPr>
+          <a:lstStyle/>
+          <a:p>
+            <a:pPr algn="l">
+              <a:lnSpc>
+                <a:spcPts val="942"/>
+              </a:lnSpc>
+            </a:pPr>
+            <a:r>
+              <a:rPr sz="650" b="1">
                 <a:solidFill>
                   <a:srgbClr val="FFFFFF"/>
                 </a:solidFill>
@@ -3328,14 +3391,14 @@
       </p:sp>
       <p:sp>
         <p:nvSpPr>
-          <p:cNvPr id="8" name="텍스트"/>
+          <p:cNvPr id="10" name="텍스트"/>
           <p:cNvSpPr txBox="1"/>
           <p:nvPr/>
         </p:nvSpPr>
         <p:spPr>
           <a:xfrm>
-            <a:off x="1656000" y="1569600"/>
-            <a:ext cx="1368000" cy="133351"/>
+            <a:off x="1188000" y="1476000"/>
+            <a:ext cx="1080000" cy="91441"/>
           </a:xfrm>
           <a:prstGeom prst="rect">
             <a:avLst/>
@@ -3350,11 +3413,53 @@
           <a:p>
             <a:pPr algn="l">
               <a:lnSpc>
-                <a:spcPts val="1015"/>
+                <a:spcPts val="696"/>
               </a:lnSpc>
             </a:pPr>
             <a:r>
-              <a:rPr sz="700" b="1">
+              <a:rPr sz="480" b="1" spc="140">
+                <a:solidFill>
+                  <a:srgbClr val="FFFFFF">
+                    <a:alpha val="70000"/>
+                  </a:srgbClr>
+                </a:solidFill>
+                <a:latin typeface="맑은 고딕"/>
+                <a:ea typeface="맑은 고딕"/>
+              </a:rPr>
+              <a:t>MAIL</a:t>
+            </a:r>
+          </a:p>
+        </p:txBody>
+      </p:sp>
+      <p:sp>
+        <p:nvSpPr>
+          <p:cNvPr id="11" name="텍스트"/>
+          <p:cNvSpPr txBox="1"/>
+          <p:nvPr/>
+        </p:nvSpPr>
+        <p:spPr>
+          <a:xfrm>
+            <a:off x="1188000" y="1576800"/>
+            <a:ext cx="1080000" cy="123826"/>
+          </a:xfrm>
+          <a:prstGeom prst="rect">
+            <a:avLst/>
+          </a:prstGeom>
+          <a:noFill/>
+        </p:spPr>
+        <p:txBody>
+          <a:bodyPr wrap="square" lIns="0" rIns="0" tIns="0" bIns="0" anchor="t">
+            <a:spAutoFit/>
+          </a:bodyPr>
+          <a:lstStyle/>
+          <a:p>
+            <a:pPr algn="l">
+              <a:lnSpc>
+                <a:spcPts val="942"/>
+              </a:lnSpc>
+            </a:pPr>
+            <a:r>
+              <a:rPr sz="650" b="1">
                 <a:solidFill>
                   <a:srgbClr val="FFFFFF"/>
                 </a:solidFill>
@@ -3366,6 +3471,27 @@
           </a:p>
         </p:txBody>
       </p:sp>
+      <p:cxnSp>
+        <p:nvCxnSpPr>
+          <p:cNvPr id="12" name="Connector 11"/>
+          <p:cNvCxnSpPr/>
+          <p:nvPr/>
+        </p:nvCxnSpPr>
+        <p:spPr>
+          <a:xfrm>
+            <a:off x="1108800" y="1468800"/>
+            <a:ext cx="0" cy="208800"/>
+          </a:xfrm>
+          <a:prstGeom prst="line">
+            <a:avLst/>
+          </a:prstGeom>
+          <a:ln w="3600">
+            <a:solidFill>
+              <a:srgbClr val="FFFFFF"/>
+            </a:solidFill>
+          </a:ln>
+        </p:spPr>
+      </p:cxnSp>
     </p:spTree>
   </p:cSld>
   <p:clrMapOvr>
@@ -3394,43 +3520,14 @@
       <p:grpSpPr/>
       <p:sp>
         <p:nvSpPr>
-          <p:cNvPr id="2" name="Oval 1"/>
-          <p:cNvSpPr/>
-          <p:nvPr/>
-        </p:nvSpPr>
-        <p:spPr>
-          <a:xfrm>
-            <a:off x="1411200" y="295200"/>
-            <a:ext cx="417600" cy="417600"/>
-          </a:xfrm>
-          <a:prstGeom prst="ellipse">
-            <a:avLst/>
-          </a:prstGeom>
-          <a:solidFill>
-            <a:srgbClr val="FF3B6B"/>
-          </a:solidFill>
-          <a:ln>
-            <a:noFill/>
-          </a:ln>
-        </p:spPr>
-        <p:txBody>
-          <a:bodyPr rtlCol="0" anchor="ctr"/>
-          <a:lstStyle/>
-          <a:p>
-            <a:pPr algn="ctr"/>
-          </a:p>
-        </p:txBody>
-      </p:sp>
-      <p:sp>
-        <p:nvSpPr>
-          <p:cNvPr id="3" name="텍스트"/>
+          <p:cNvPr id="2" name="텍스트"/>
           <p:cNvSpPr txBox="1"/>
           <p:nvPr/>
         </p:nvSpPr>
         <p:spPr>
           <a:xfrm>
-            <a:off x="1368000" y="324000"/>
-            <a:ext cx="504000" cy="360000"/>
+            <a:off x="252000" y="252000"/>
+            <a:ext cx="1080000" cy="99061"/>
           </a:xfrm>
           <a:prstGeom prst="rect">
             <a:avLst/>
@@ -3438,79 +3535,39 @@
           <a:noFill/>
         </p:spPr>
         <p:txBody>
-          <a:bodyPr wrap="square" lIns="0" rIns="0" tIns="0" bIns="0" anchor="ctr">
+          <a:bodyPr wrap="square" lIns="0" rIns="0" tIns="0" bIns="0" anchor="t">
             <a:spAutoFit/>
           </a:bodyPr>
           <a:lstStyle/>
           <a:p>
-            <a:pPr algn="ctr">
+            <a:pPr algn="l">
               <a:lnSpc>
-                <a:spcPts val="3769"/>
+                <a:spcPts val="754"/>
               </a:lnSpc>
             </a:pPr>
             <a:r>
-              <a:rPr sz="2600" b="1">
+              <a:rPr sz="520" b="1" spc="240">
                 <a:solidFill>
-                  <a:srgbClr val="FFFFFF"/>
+                  <a:srgbClr val="6B7280"/>
                 </a:solidFill>
                 <a:latin typeface="맑은 고딕"/>
                 <a:ea typeface="맑은 고딕"/>
               </a:rPr>
-              <a:t>상</a:t>
-            </a:r>
-          </a:p>
-        </p:txBody>
-      </p:sp>
-      <p:sp>
-        <p:nvSpPr>
-          <p:cNvPr id="4" name="텍스트"/>
-          <p:cNvSpPr txBox="1"/>
-          <p:nvPr/>
-        </p:nvSpPr>
-        <p:spPr>
-          <a:xfrm>
-            <a:off x="360000" y="820800"/>
-            <a:ext cx="2520000" cy="161926"/>
-          </a:xfrm>
-          <a:prstGeom prst="rect">
-            <a:avLst/>
-          </a:prstGeom>
-          <a:noFill/>
-        </p:spPr>
-        <p:txBody>
-          <a:bodyPr wrap="square" lIns="0" rIns="0" tIns="0" bIns="0" anchor="t">
-            <a:spAutoFit/>
-          </a:bodyPr>
-          <a:lstStyle/>
-          <a:p>
-            <a:pPr algn="ctr">
-              <a:lnSpc>
-                <a:spcPts val="1232"/>
-              </a:lnSpc>
-            </a:pPr>
-            <a:r>
-              <a:rPr sz="850" b="1" spc="200">
-                <a:solidFill>
-                  <a:srgbClr val="12151C"/>
-                </a:solidFill>
-                <a:latin typeface="맑은 고딕"/>
-                <a:ea typeface="맑은 고딕"/>
-              </a:rPr>
-              <a:t>상호명</a:t>
-            </a:r>
-          </a:p>
-        </p:txBody>
-      </p:sp>
-      <p:sp>
-        <p:nvSpPr>
-          <p:cNvPr id="5" name="Rectangle 4"/>
+              <a:t>취급 품목</a:t>
+            </a:r>
+          </a:p>
+        </p:txBody>
+      </p:sp>
+      <p:sp>
+        <p:nvSpPr>
+          <p:cNvPr id="3" name="Rectangle 2"/>
           <p:cNvSpPr/>
           <p:nvPr/>
         </p:nvSpPr>
         <p:spPr>
           <a:xfrm>
-            <a:off x="1530000" y="1051200"/>
-            <a:ext cx="180000" cy="14400"/>
+            <a:off x="252000" y="367200"/>
+            <a:ext cx="108000" cy="14400"/>
           </a:xfrm>
           <a:prstGeom prst="rect">
             <a:avLst/>
@@ -3532,14 +3589,45 @@
       </p:sp>
       <p:sp>
         <p:nvSpPr>
-          <p:cNvPr id="6" name="텍스트"/>
+          <p:cNvPr id="4" name="Rounded Rectangle 3"/>
+          <p:cNvSpPr/>
+          <p:nvPr/>
+        </p:nvSpPr>
+        <p:spPr>
+          <a:xfrm>
+            <a:off x="252000" y="540000"/>
+            <a:ext cx="835467" cy="194361"/>
+          </a:xfrm>
+          <a:prstGeom prst="roundRect">
+            <a:avLst>
+              <a:gd name="adj" fmla="val 50000"/>
+            </a:avLst>
+          </a:prstGeom>
+          <a:noFill/>
+          <a:ln w="3600">
+            <a:solidFill>
+              <a:srgbClr val="6B7280"/>
+            </a:solidFill>
+          </a:ln>
+        </p:spPr>
+        <p:txBody>
+          <a:bodyPr rtlCol="0" anchor="ctr"/>
+          <a:lstStyle/>
+          <a:p>
+            <a:pPr algn="ctr"/>
+          </a:p>
+        </p:txBody>
+      </p:sp>
+      <p:sp>
+        <p:nvSpPr>
+          <p:cNvPr id="5" name="텍스트"/>
           <p:cNvSpPr txBox="1"/>
           <p:nvPr/>
         </p:nvSpPr>
         <p:spPr>
           <a:xfrm>
-            <a:off x="540000" y="1188000"/>
-            <a:ext cx="2160000" cy="360000"/>
+            <a:off x="252000" y="540000"/>
+            <a:ext cx="835467" cy="194361"/>
           </a:xfrm>
           <a:prstGeom prst="rect">
             <a:avLst/>
@@ -3547,25 +3635,459 @@
           <a:noFill/>
         </p:spPr>
         <p:txBody>
+          <a:bodyPr wrap="square" lIns="0" rIns="0" tIns="0" bIns="0" anchor="ctr">
+            <a:spAutoFit/>
+          </a:bodyPr>
+          <a:lstStyle/>
+          <a:p>
+            <a:pPr algn="ctr">
+              <a:lnSpc>
+                <a:spcPts val="986"/>
+              </a:lnSpc>
+            </a:pPr>
+            <a:r>
+              <a:rPr sz="680" b="0">
+                <a:solidFill>
+                  <a:srgbClr val="12151C"/>
+                </a:solidFill>
+                <a:latin typeface="맑은 고딕"/>
+                <a:ea typeface="맑은 고딕"/>
+              </a:rPr>
+              <a:t>생화 · 꽃다발</a:t>
+            </a:r>
+          </a:p>
+        </p:txBody>
+      </p:sp>
+      <p:sp>
+        <p:nvSpPr>
+          <p:cNvPr id="6" name="Rounded Rectangle 5"/>
+          <p:cNvSpPr/>
+          <p:nvPr/>
+        </p:nvSpPr>
+        <p:spPr>
+          <a:xfrm>
+            <a:off x="1137867" y="540000"/>
+            <a:ext cx="412300" cy="194361"/>
+          </a:xfrm>
+          <a:prstGeom prst="roundRect">
+            <a:avLst>
+              <a:gd name="adj" fmla="val 50000"/>
+            </a:avLst>
+          </a:prstGeom>
+          <a:noFill/>
+          <a:ln w="3600">
+            <a:solidFill>
+              <a:srgbClr val="6B7280"/>
+            </a:solidFill>
+          </a:ln>
+        </p:spPr>
+        <p:txBody>
+          <a:bodyPr rtlCol="0" anchor="ctr"/>
+          <a:lstStyle/>
+          <a:p>
+            <a:pPr algn="ctr"/>
+          </a:p>
+        </p:txBody>
+      </p:sp>
+      <p:sp>
+        <p:nvSpPr>
+          <p:cNvPr id="7" name="텍스트"/>
+          <p:cNvSpPr txBox="1"/>
+          <p:nvPr/>
+        </p:nvSpPr>
+        <p:spPr>
+          <a:xfrm>
+            <a:off x="1137867" y="540000"/>
+            <a:ext cx="412300" cy="194361"/>
+          </a:xfrm>
+          <a:prstGeom prst="rect">
+            <a:avLst/>
+          </a:prstGeom>
+          <a:noFill/>
+        </p:spPr>
+        <p:txBody>
+          <a:bodyPr wrap="square" lIns="0" rIns="0" tIns="0" bIns="0" anchor="ctr">
+            <a:spAutoFit/>
+          </a:bodyPr>
+          <a:lstStyle/>
+          <a:p>
+            <a:pPr algn="ctr">
+              <a:lnSpc>
+                <a:spcPts val="986"/>
+              </a:lnSpc>
+            </a:pPr>
+            <a:r>
+              <a:rPr sz="680" b="0">
+                <a:solidFill>
+                  <a:srgbClr val="12151C"/>
+                </a:solidFill>
+                <a:latin typeface="맑은 고딕"/>
+                <a:ea typeface="맑은 고딕"/>
+              </a:rPr>
+              <a:t>도어락</a:t>
+            </a:r>
+          </a:p>
+        </p:txBody>
+      </p:sp>
+      <p:sp>
+        <p:nvSpPr>
+          <p:cNvPr id="8" name="Rounded Rectangle 7"/>
+          <p:cNvSpPr/>
+          <p:nvPr/>
+        </p:nvSpPr>
+        <p:spPr>
+          <a:xfrm>
+            <a:off x="1600567" y="540000"/>
+            <a:ext cx="496933" cy="194361"/>
+          </a:xfrm>
+          <a:prstGeom prst="roundRect">
+            <a:avLst>
+              <a:gd name="adj" fmla="val 50000"/>
+            </a:avLst>
+          </a:prstGeom>
+          <a:noFill/>
+          <a:ln w="3600">
+            <a:solidFill>
+              <a:srgbClr val="6B7280"/>
+            </a:solidFill>
+          </a:ln>
+        </p:spPr>
+        <p:txBody>
+          <a:bodyPr rtlCol="0" anchor="ctr"/>
+          <a:lstStyle/>
+          <a:p>
+            <a:pPr algn="ctr"/>
+          </a:p>
+        </p:txBody>
+      </p:sp>
+      <p:sp>
+        <p:nvSpPr>
+          <p:cNvPr id="9" name="텍스트"/>
+          <p:cNvSpPr txBox="1"/>
+          <p:nvPr/>
+        </p:nvSpPr>
+        <p:spPr>
+          <a:xfrm>
+            <a:off x="1600567" y="540000"/>
+            <a:ext cx="496933" cy="194361"/>
+          </a:xfrm>
+          <a:prstGeom prst="rect">
+            <a:avLst/>
+          </a:prstGeom>
+          <a:noFill/>
+        </p:spPr>
+        <p:txBody>
+          <a:bodyPr wrap="square" lIns="0" rIns="0" tIns="0" bIns="0" anchor="ctr">
+            <a:spAutoFit/>
+          </a:bodyPr>
+          <a:lstStyle/>
+          <a:p>
+            <a:pPr algn="ctr">
+              <a:lnSpc>
+                <a:spcPts val="986"/>
+              </a:lnSpc>
+            </a:pPr>
+            <a:r>
+              <a:rPr sz="680" b="0">
+                <a:solidFill>
+                  <a:srgbClr val="12151C"/>
+                </a:solidFill>
+                <a:latin typeface="맑은 고딕"/>
+                <a:ea typeface="맑은 고딕"/>
+              </a:rPr>
+              <a:t>인테리어</a:t>
+            </a:r>
+          </a:p>
+        </p:txBody>
+      </p:sp>
+      <p:sp>
+        <p:nvSpPr>
+          <p:cNvPr id="10" name="Rounded Rectangle 9"/>
+          <p:cNvSpPr/>
+          <p:nvPr/>
+        </p:nvSpPr>
+        <p:spPr>
+          <a:xfrm>
+            <a:off x="2147900" y="540000"/>
+            <a:ext cx="750833" cy="194361"/>
+          </a:xfrm>
+          <a:prstGeom prst="roundRect">
+            <a:avLst>
+              <a:gd name="adj" fmla="val 50000"/>
+            </a:avLst>
+          </a:prstGeom>
+          <a:noFill/>
+          <a:ln w="3600">
+            <a:solidFill>
+              <a:srgbClr val="6B7280"/>
+            </a:solidFill>
+          </a:ln>
+        </p:spPr>
+        <p:txBody>
+          <a:bodyPr rtlCol="0" anchor="ctr"/>
+          <a:lstStyle/>
+          <a:p>
+            <a:pPr algn="ctr"/>
+          </a:p>
+        </p:txBody>
+      </p:sp>
+      <p:sp>
+        <p:nvSpPr>
+          <p:cNvPr id="11" name="텍스트"/>
+          <p:cNvSpPr txBox="1"/>
+          <p:nvPr/>
+        </p:nvSpPr>
+        <p:spPr>
+          <a:xfrm>
+            <a:off x="2147900" y="540000"/>
+            <a:ext cx="750833" cy="194361"/>
+          </a:xfrm>
+          <a:prstGeom prst="rect">
+            <a:avLst/>
+          </a:prstGeom>
+          <a:noFill/>
+        </p:spPr>
+        <p:txBody>
+          <a:bodyPr wrap="square" lIns="0" rIns="0" tIns="0" bIns="0" anchor="ctr">
+            <a:spAutoFit/>
+          </a:bodyPr>
+          <a:lstStyle/>
+          <a:p>
+            <a:pPr algn="ctr">
+              <a:lnSpc>
+                <a:spcPts val="986"/>
+              </a:lnSpc>
+            </a:pPr>
+            <a:r>
+              <a:rPr sz="680" b="0">
+                <a:solidFill>
+                  <a:srgbClr val="12151C"/>
+                </a:solidFill>
+                <a:latin typeface="맑은 고딕"/>
+                <a:ea typeface="맑은 고딕"/>
+              </a:rPr>
+              <a:t>소품 · 문구</a:t>
+            </a:r>
+          </a:p>
+        </p:txBody>
+      </p:sp>
+      <p:cxnSp>
+        <p:nvCxnSpPr>
+          <p:cNvPr id="12" name="Connector 11"/>
+          <p:cNvCxnSpPr/>
+          <p:nvPr/>
+        </p:nvCxnSpPr>
+        <p:spPr>
+          <a:xfrm>
+            <a:off x="252000" y="1339200"/>
+            <a:ext cx="2736000" cy="0"/>
+          </a:xfrm>
+          <a:prstGeom prst="line">
+            <a:avLst/>
+          </a:prstGeom>
+          <a:ln w="3600">
+            <a:solidFill>
+              <a:srgbClr val="E3E5E9"/>
+            </a:solidFill>
+          </a:ln>
+        </p:spPr>
+      </p:cxnSp>
+      <p:sp>
+        <p:nvSpPr>
+          <p:cNvPr id="13" name="텍스트"/>
+          <p:cNvSpPr txBox="1"/>
+          <p:nvPr/>
+        </p:nvSpPr>
+        <p:spPr>
+          <a:xfrm>
+            <a:off x="252000" y="1422000"/>
+            <a:ext cx="396000" cy="91441"/>
+          </a:xfrm>
+          <a:prstGeom prst="rect">
+            <a:avLst/>
+          </a:prstGeom>
+          <a:noFill/>
+        </p:spPr>
+        <p:txBody>
           <a:bodyPr wrap="square" lIns="0" rIns="0" tIns="0" bIns="0" anchor="t">
             <a:spAutoFit/>
           </a:bodyPr>
           <a:lstStyle/>
           <a:p>
-            <a:pPr algn="ctr">
+            <a:pPr algn="l">
               <a:lnSpc>
-                <a:spcPts val="1305"/>
+                <a:spcPts val="696"/>
               </a:lnSpc>
             </a:pPr>
             <a:r>
-              <a:rPr sz="900" b="1">
+              <a:rPr sz="480" b="1" spc="140">
                 <a:solidFill>
                   <a:srgbClr val="6B7280"/>
                 </a:solidFill>
                 <a:latin typeface="맑은 고딕"/>
                 <a:ea typeface="맑은 고딕"/>
               </a:rPr>
-              <a:t>정성으로 손보는 작은 살림</a:t>
+              <a:t>HOURS</a:t>
+            </a:r>
+          </a:p>
+        </p:txBody>
+      </p:sp>
+      <p:sp>
+        <p:nvSpPr>
+          <p:cNvPr id="14" name="텍스트"/>
+          <p:cNvSpPr txBox="1"/>
+          <p:nvPr/>
+        </p:nvSpPr>
+        <p:spPr>
+          <a:xfrm>
+            <a:off x="648000" y="1411200"/>
+            <a:ext cx="2340000" cy="121921"/>
+          </a:xfrm>
+          <a:prstGeom prst="rect">
+            <a:avLst/>
+          </a:prstGeom>
+          <a:noFill/>
+        </p:spPr>
+        <p:txBody>
+          <a:bodyPr wrap="square" lIns="0" rIns="0" tIns="0" bIns="0" anchor="t">
+            <a:spAutoFit/>
+          </a:bodyPr>
+          <a:lstStyle/>
+          <a:p>
+            <a:pPr algn="l">
+              <a:lnSpc>
+                <a:spcPts val="927"/>
+              </a:lnSpc>
+            </a:pPr>
+            <a:r>
+              <a:rPr sz="640" b="0">
+                <a:solidFill>
+                  <a:srgbClr val="12151C"/>
+                </a:solidFill>
+                <a:latin typeface="맑은 고딕"/>
+                <a:ea typeface="맑은 고딕"/>
+              </a:rPr>
+              <a:t>매일 10:00 – 20:00</a:t>
+            </a:r>
+          </a:p>
+        </p:txBody>
+      </p:sp>
+      <p:sp>
+        <p:nvSpPr>
+          <p:cNvPr id="15" name="텍스트"/>
+          <p:cNvSpPr txBox="1"/>
+          <p:nvPr/>
+        </p:nvSpPr>
+        <p:spPr>
+          <a:xfrm>
+            <a:off x="252000" y="1580400"/>
+            <a:ext cx="396000" cy="91441"/>
+          </a:xfrm>
+          <a:prstGeom prst="rect">
+            <a:avLst/>
+          </a:prstGeom>
+          <a:noFill/>
+        </p:spPr>
+        <p:txBody>
+          <a:bodyPr wrap="square" lIns="0" rIns="0" tIns="0" bIns="0" anchor="t">
+            <a:spAutoFit/>
+          </a:bodyPr>
+          <a:lstStyle/>
+          <a:p>
+            <a:pPr algn="l">
+              <a:lnSpc>
+                <a:spcPts val="696"/>
+              </a:lnSpc>
+            </a:pPr>
+            <a:r>
+              <a:rPr sz="480" b="1" spc="140">
+                <a:solidFill>
+                  <a:srgbClr val="6B7280"/>
+                </a:solidFill>
+                <a:latin typeface="맑은 고딕"/>
+                <a:ea typeface="맑은 고딕"/>
+              </a:rPr>
+              <a:t>KAKAO</a:t>
+            </a:r>
+          </a:p>
+        </p:txBody>
+      </p:sp>
+      <p:sp>
+        <p:nvSpPr>
+          <p:cNvPr id="16" name="텍스트"/>
+          <p:cNvSpPr txBox="1"/>
+          <p:nvPr/>
+        </p:nvSpPr>
+        <p:spPr>
+          <a:xfrm>
+            <a:off x="648000" y="1569600"/>
+            <a:ext cx="2340000" cy="121921"/>
+          </a:xfrm>
+          <a:prstGeom prst="rect">
+            <a:avLst/>
+          </a:prstGeom>
+          <a:noFill/>
+        </p:spPr>
+        <p:txBody>
+          <a:bodyPr wrap="square" lIns="0" rIns="0" tIns="0" bIns="0" anchor="t">
+            <a:spAutoFit/>
+          </a:bodyPr>
+          <a:lstStyle/>
+          <a:p>
+            <a:pPr algn="l">
+              <a:lnSpc>
+                <a:spcPts val="927"/>
+              </a:lnSpc>
+            </a:pPr>
+            <a:r>
+              <a:rPr sz="640" b="0">
+                <a:solidFill>
+                  <a:srgbClr val="12151C"/>
+                </a:solidFill>
+                <a:latin typeface="맑은 고딕"/>
+                <a:ea typeface="맑은 고딕"/>
+              </a:rPr>
+              <a:t>@채널아이디</a:t>
+            </a:r>
+          </a:p>
+        </p:txBody>
+      </p:sp>
+      <p:sp>
+        <p:nvSpPr>
+          <p:cNvPr id="17" name="텍스트"/>
+          <p:cNvSpPr txBox="1"/>
+          <p:nvPr/>
+        </p:nvSpPr>
+        <p:spPr>
+          <a:xfrm>
+            <a:off x="1548000" y="1411200"/>
+            <a:ext cx="1440000" cy="123826"/>
+          </a:xfrm>
+          <a:prstGeom prst="rect">
+            <a:avLst/>
+          </a:prstGeom>
+          <a:noFill/>
+        </p:spPr>
+        <p:txBody>
+          <a:bodyPr wrap="square" lIns="0" rIns="0" tIns="0" bIns="0" anchor="t">
+            <a:spAutoFit/>
+          </a:bodyPr>
+          <a:lstStyle/>
+          <a:p>
+            <a:pPr algn="r">
+              <a:lnSpc>
+                <a:spcPts val="942"/>
+              </a:lnSpc>
+            </a:pPr>
+            <a:r>
+              <a:rPr sz="650" b="1" spc="220">
+                <a:solidFill>
+                  <a:srgbClr val="6B7280"/>
+                </a:solidFill>
+                <a:latin typeface="맑은 고딕"/>
+                <a:ea typeface="맑은 고딕"/>
+              </a:rPr>
+              <a:t>상호명</a:t>
             </a:r>
           </a:p>
         </p:txBody>
